--- a/assets/pptx/catalog-106.pptx
+++ b/assets/pptx/catalog-106.pptx
@@ -3246,7 +3246,7 @@
                 <a:ea typeface="Ebrima"/>
                 <a:cs typeface="Ebrima"/>
               </a:rPr>
-              <a:t>ማለዳ (2x) ኦ አዲስ ነው ምህረቱ</a:t>
+              <a:t>ማለዳ 2x ኦ አዲስ ነው ምህረቱ</a:t>
             </a:r>
           </a:p>
           <a:p>
